--- a/Cornerstone-CH.pptx
+++ b/Cornerstone-CH.pptx
@@ -266,7 +266,7 @@
           <a:p>
             <a:fld id="{E759A0DE-F190-5444-87AC-4719D5F20D15}" type="datetimeFigureOut">
               <a:rPr lang="en-US" smtClean="0"/>
-              <a:t>5/31/26</a:t>
+              <a:t>6/13/26</a:t>
             </a:fld>
             <a:endParaRPr lang="en-US"/>
           </a:p>
@@ -464,7 +464,7 @@
           <a:p>
             <a:fld id="{E759A0DE-F190-5444-87AC-4719D5F20D15}" type="datetimeFigureOut">
               <a:rPr lang="en-US" smtClean="0"/>
-              <a:t>5/31/26</a:t>
+              <a:t>6/13/26</a:t>
             </a:fld>
             <a:endParaRPr lang="en-US"/>
           </a:p>
@@ -672,7 +672,7 @@
           <a:p>
             <a:fld id="{E759A0DE-F190-5444-87AC-4719D5F20D15}" type="datetimeFigureOut">
               <a:rPr lang="en-US" smtClean="0"/>
-              <a:t>5/31/26</a:t>
+              <a:t>6/13/26</a:t>
             </a:fld>
             <a:endParaRPr lang="en-US"/>
           </a:p>
@@ -870,7 +870,7 @@
           <a:p>
             <a:fld id="{E759A0DE-F190-5444-87AC-4719D5F20D15}" type="datetimeFigureOut">
               <a:rPr lang="en-US" smtClean="0"/>
-              <a:t>5/31/26</a:t>
+              <a:t>6/13/26</a:t>
             </a:fld>
             <a:endParaRPr lang="en-US"/>
           </a:p>
@@ -1145,7 +1145,7 @@
           <a:p>
             <a:fld id="{E759A0DE-F190-5444-87AC-4719D5F20D15}" type="datetimeFigureOut">
               <a:rPr lang="en-US" smtClean="0"/>
-              <a:t>5/31/26</a:t>
+              <a:t>6/13/26</a:t>
             </a:fld>
             <a:endParaRPr lang="en-US"/>
           </a:p>
@@ -1410,7 +1410,7 @@
           <a:p>
             <a:fld id="{E759A0DE-F190-5444-87AC-4719D5F20D15}" type="datetimeFigureOut">
               <a:rPr lang="en-US" smtClean="0"/>
-              <a:t>5/31/26</a:t>
+              <a:t>6/13/26</a:t>
             </a:fld>
             <a:endParaRPr lang="en-US"/>
           </a:p>
@@ -1822,7 +1822,7 @@
           <a:p>
             <a:fld id="{E759A0DE-F190-5444-87AC-4719D5F20D15}" type="datetimeFigureOut">
               <a:rPr lang="en-US" smtClean="0"/>
-              <a:t>5/31/26</a:t>
+              <a:t>6/13/26</a:t>
             </a:fld>
             <a:endParaRPr lang="en-US"/>
           </a:p>
@@ -1963,7 +1963,7 @@
           <a:p>
             <a:fld id="{E759A0DE-F190-5444-87AC-4719D5F20D15}" type="datetimeFigureOut">
               <a:rPr lang="en-US" smtClean="0"/>
-              <a:t>5/31/26</a:t>
+              <a:t>6/13/26</a:t>
             </a:fld>
             <a:endParaRPr lang="en-US"/>
           </a:p>
@@ -2076,7 +2076,7 @@
           <a:p>
             <a:fld id="{E759A0DE-F190-5444-87AC-4719D5F20D15}" type="datetimeFigureOut">
               <a:rPr lang="en-US" smtClean="0"/>
-              <a:t>5/31/26</a:t>
+              <a:t>6/13/26</a:t>
             </a:fld>
             <a:endParaRPr lang="en-US"/>
           </a:p>
@@ -2387,7 +2387,7 @@
           <a:p>
             <a:fld id="{E759A0DE-F190-5444-87AC-4719D5F20D15}" type="datetimeFigureOut">
               <a:rPr lang="en-US" smtClean="0"/>
-              <a:t>5/31/26</a:t>
+              <a:t>6/13/26</a:t>
             </a:fld>
             <a:endParaRPr lang="en-US"/>
           </a:p>
@@ -2675,7 +2675,7 @@
           <a:p>
             <a:fld id="{E759A0DE-F190-5444-87AC-4719D5F20D15}" type="datetimeFigureOut">
               <a:rPr lang="en-US" smtClean="0"/>
-              <a:t>5/31/26</a:t>
+              <a:t>6/13/26</a:t>
             </a:fld>
             <a:endParaRPr lang="en-US"/>
           </a:p>
@@ -2916,7 +2916,7 @@
           <a:p>
             <a:fld id="{E759A0DE-F190-5444-87AC-4719D5F20D15}" type="datetimeFigureOut">
               <a:rPr lang="en-US" smtClean="0"/>
-              <a:t>5/31/26</a:t>
+              <a:t>6/13/26</a:t>
             </a:fld>
             <a:endParaRPr lang="en-US"/>
           </a:p>
@@ -5077,6 +5077,45 @@
           </a:p>
         </p:txBody>
       </p:sp>
+      <p:sp>
+        <p:nvSpPr>
+          <p:cNvPr id="2" name="TextBox 1">
+            <a:extLst>
+              <a:ext uri="{FF2B5EF4-FFF2-40B4-BE49-F238E27FC236}">
+                <a16:creationId xmlns:a16="http://schemas.microsoft.com/office/drawing/2014/main" id="{36D8A440-5950-94CE-1CF9-ED0AFB54C36F}"/>
+              </a:ext>
+            </a:extLst>
+          </p:cNvPr>
+          <p:cNvSpPr txBox="1"/>
+          <p:nvPr/>
+        </p:nvSpPr>
+        <p:spPr>
+          <a:xfrm>
+            <a:off x="11005665" y="6273225"/>
+            <a:ext cx="1007007" cy="584775"/>
+          </a:xfrm>
+          <a:prstGeom prst="rect">
+            <a:avLst/>
+          </a:prstGeom>
+          <a:noFill/>
+        </p:spPr>
+        <p:txBody>
+          <a:bodyPr wrap="none" rtlCol="0">
+            <a:spAutoFit/>
+          </a:bodyPr>
+          <a:lstStyle/>
+          <a:p>
+            <a:r>
+              <a:rPr lang="en-US" sz="3200" b="1" dirty="0">
+                <a:solidFill>
+                  <a:srgbClr val="FF0000"/>
+                </a:solidFill>
+              </a:rPr>
+              <a:t>END</a:t>
+            </a:r>
+          </a:p>
+        </p:txBody>
+      </p:sp>
     </p:spTree>
     <p:extLst>
       <p:ext uri="{BB962C8B-B14F-4D97-AF65-F5344CB8AC3E}">
